--- a/public/videos/repositories/price-review-compare/price-review-compare-tech-preview.pptx
+++ b/public/videos/repositories/price-review-compare/price-review-compare-tech-preview.pptx
@@ -134,7 +134,7 @@
           <p:cNvPr id="2" name="タイトル 1">
             <a:extLst>
               <a:ext uri="{FF2B5EF4-FFF2-40B4-BE49-F238E27FC236}">
-                <a16:creationId xmlns:a16="http://schemas.microsoft.com/office/drawing/2014/main" id="{DCDA60CA-5410-837C-451F-5BFC1C94EFC7}"/>
+                <a16:creationId xmlns:a16="http://schemas.microsoft.com/office/drawing/2014/main" id="{3271F795-F2B5-6732-20CD-CAE1DB1C6103}"/>
               </a:ext>
             </a:extLst>
           </p:cNvPr>
@@ -171,7 +171,7 @@
           <p:cNvPr id="3" name="字幕 2">
             <a:extLst>
               <a:ext uri="{FF2B5EF4-FFF2-40B4-BE49-F238E27FC236}">
-                <a16:creationId xmlns:a16="http://schemas.microsoft.com/office/drawing/2014/main" id="{B7A1930E-8290-CDE2-30D7-5515E20378B5}"/>
+                <a16:creationId xmlns:a16="http://schemas.microsoft.com/office/drawing/2014/main" id="{C4EC91F7-2300-1C06-8D5E-FEDC94F3C2EC}"/>
               </a:ext>
             </a:extLst>
           </p:cNvPr>
@@ -241,7 +241,7 @@
           <p:cNvPr id="4" name="日付プレースホルダー 3">
             <a:extLst>
               <a:ext uri="{FF2B5EF4-FFF2-40B4-BE49-F238E27FC236}">
-                <a16:creationId xmlns:a16="http://schemas.microsoft.com/office/drawing/2014/main" id="{EB16C80C-1465-6806-B862-1581CB661A36}"/>
+                <a16:creationId xmlns:a16="http://schemas.microsoft.com/office/drawing/2014/main" id="{9D2BF1F0-5983-8190-A0A6-210170902F04}"/>
               </a:ext>
             </a:extLst>
           </p:cNvPr>
@@ -257,7 +257,7 @@
           <a:bodyPr/>
           <a:lstStyle/>
           <a:p>
-            <a:fld id="{01263597-6936-4BB2-8D3D-31DB45F24DDB}" type="datetimeFigureOut">
+            <a:fld id="{D8827759-9E9D-4BCD-80EE-8117F6B69200}" type="datetimeFigureOut">
               <a:rPr kumimoji="1" lang="ja-JP" altLang="en-US" smtClean="0"/>
               <a:t>2026/7/30</a:t>
             </a:fld>
@@ -270,7 +270,7 @@
           <p:cNvPr id="5" name="フッター プレースホルダー 4">
             <a:extLst>
               <a:ext uri="{FF2B5EF4-FFF2-40B4-BE49-F238E27FC236}">
-                <a16:creationId xmlns:a16="http://schemas.microsoft.com/office/drawing/2014/main" id="{1A5112E3-694E-A55F-7341-C44B324D8345}"/>
+                <a16:creationId xmlns:a16="http://schemas.microsoft.com/office/drawing/2014/main" id="{652B19D6-C58F-E699-54AC-988F5602418F}"/>
               </a:ext>
             </a:extLst>
           </p:cNvPr>
@@ -295,7 +295,7 @@
           <p:cNvPr id="6" name="スライド番号プレースホルダー 5">
             <a:extLst>
               <a:ext uri="{FF2B5EF4-FFF2-40B4-BE49-F238E27FC236}">
-                <a16:creationId xmlns:a16="http://schemas.microsoft.com/office/drawing/2014/main" id="{0815CCDA-AB9B-0D1B-4EA0-AF4C6A8A6ECD}"/>
+                <a16:creationId xmlns:a16="http://schemas.microsoft.com/office/drawing/2014/main" id="{C36C035F-8349-8BDC-DBEA-01508B28416F}"/>
               </a:ext>
             </a:extLst>
           </p:cNvPr>
@@ -311,7 +311,7 @@
           <a:bodyPr/>
           <a:lstStyle/>
           <a:p>
-            <a:fld id="{739C73A2-29A2-471A-8A20-A8F5413FB700}" type="slidenum">
+            <a:fld id="{01F50A0A-288D-47A2-A2D6-08734344160D}" type="slidenum">
               <a:rPr kumimoji="1" lang="ja-JP" altLang="en-US" smtClean="0"/>
               <a:t>‹#›</a:t>
             </a:fld>
@@ -322,7 +322,7 @@
     </p:spTree>
     <p:extLst>
       <p:ext uri="{BB962C8B-B14F-4D97-AF65-F5344CB8AC3E}">
-        <p14:creationId xmlns:p14="http://schemas.microsoft.com/office/powerpoint/2010/main" val="3377542775"/>
+        <p14:creationId xmlns:p14="http://schemas.microsoft.com/office/powerpoint/2010/main" val="1038943123"/>
       </p:ext>
     </p:extLst>
   </p:cSld>
@@ -354,7 +354,7 @@
           <p:cNvPr id="2" name="タイトル 1">
             <a:extLst>
               <a:ext uri="{FF2B5EF4-FFF2-40B4-BE49-F238E27FC236}">
-                <a16:creationId xmlns:a16="http://schemas.microsoft.com/office/drawing/2014/main" id="{EF00BE34-CB9B-C68A-601E-22928066AB10}"/>
+                <a16:creationId xmlns:a16="http://schemas.microsoft.com/office/drawing/2014/main" id="{CCDBCA20-6466-C1CB-045F-FDBF759AADF5}"/>
               </a:ext>
             </a:extLst>
           </p:cNvPr>
@@ -382,7 +382,7 @@
           <p:cNvPr id="3" name="縦書きテキスト プレースホルダー 2">
             <a:extLst>
               <a:ext uri="{FF2B5EF4-FFF2-40B4-BE49-F238E27FC236}">
-                <a16:creationId xmlns:a16="http://schemas.microsoft.com/office/drawing/2014/main" id="{97B2C23A-68F2-A9F6-CA6C-8F22704181C8}"/>
+                <a16:creationId xmlns:a16="http://schemas.microsoft.com/office/drawing/2014/main" id="{A0A7D5AE-2E7D-61ED-F7D4-C96D1DD992CE}"/>
               </a:ext>
             </a:extLst>
           </p:cNvPr>
@@ -471,7 +471,7 @@
           <p:cNvPr id="4" name="日付プレースホルダー 3">
             <a:extLst>
               <a:ext uri="{FF2B5EF4-FFF2-40B4-BE49-F238E27FC236}">
-                <a16:creationId xmlns:a16="http://schemas.microsoft.com/office/drawing/2014/main" id="{F49F9DA4-BA33-F467-BCA9-44CE2EE9B57A}"/>
+                <a16:creationId xmlns:a16="http://schemas.microsoft.com/office/drawing/2014/main" id="{D57C19C3-DB8D-5FBF-99CE-F1C0E7E769A1}"/>
               </a:ext>
             </a:extLst>
           </p:cNvPr>
@@ -487,7 +487,7 @@
           <a:bodyPr/>
           <a:lstStyle/>
           <a:p>
-            <a:fld id="{01263597-6936-4BB2-8D3D-31DB45F24DDB}" type="datetimeFigureOut">
+            <a:fld id="{D8827759-9E9D-4BCD-80EE-8117F6B69200}" type="datetimeFigureOut">
               <a:rPr kumimoji="1" lang="ja-JP" altLang="en-US" smtClean="0"/>
               <a:t>2026/7/30</a:t>
             </a:fld>
@@ -500,7 +500,7 @@
           <p:cNvPr id="5" name="フッター プレースホルダー 4">
             <a:extLst>
               <a:ext uri="{FF2B5EF4-FFF2-40B4-BE49-F238E27FC236}">
-                <a16:creationId xmlns:a16="http://schemas.microsoft.com/office/drawing/2014/main" id="{50BD7CCA-5720-0140-A9B9-A24C36E8FA6D}"/>
+                <a16:creationId xmlns:a16="http://schemas.microsoft.com/office/drawing/2014/main" id="{6F56C95D-8A3D-8F6B-F8EB-714E1B4C9D22}"/>
               </a:ext>
             </a:extLst>
           </p:cNvPr>
@@ -525,7 +525,7 @@
           <p:cNvPr id="6" name="スライド番号プレースホルダー 5">
             <a:extLst>
               <a:ext uri="{FF2B5EF4-FFF2-40B4-BE49-F238E27FC236}">
-                <a16:creationId xmlns:a16="http://schemas.microsoft.com/office/drawing/2014/main" id="{FCA9D4D9-0064-AB99-9693-4152E3D7DEC9}"/>
+                <a16:creationId xmlns:a16="http://schemas.microsoft.com/office/drawing/2014/main" id="{7351A45E-60D2-FA41-6EA3-547D92241064}"/>
               </a:ext>
             </a:extLst>
           </p:cNvPr>
@@ -541,7 +541,7 @@
           <a:bodyPr/>
           <a:lstStyle/>
           <a:p>
-            <a:fld id="{739C73A2-29A2-471A-8A20-A8F5413FB700}" type="slidenum">
+            <a:fld id="{01F50A0A-288D-47A2-A2D6-08734344160D}" type="slidenum">
               <a:rPr kumimoji="1" lang="ja-JP" altLang="en-US" smtClean="0"/>
               <a:t>‹#›</a:t>
             </a:fld>
@@ -552,7 +552,7 @@
     </p:spTree>
     <p:extLst>
       <p:ext uri="{BB962C8B-B14F-4D97-AF65-F5344CB8AC3E}">
-        <p14:creationId xmlns:p14="http://schemas.microsoft.com/office/powerpoint/2010/main" val="3916755565"/>
+        <p14:creationId xmlns:p14="http://schemas.microsoft.com/office/powerpoint/2010/main" val="3640670776"/>
       </p:ext>
     </p:extLst>
   </p:cSld>
@@ -584,7 +584,7 @@
           <p:cNvPr id="2" name="縦書きタイトル 1">
             <a:extLst>
               <a:ext uri="{FF2B5EF4-FFF2-40B4-BE49-F238E27FC236}">
-                <a16:creationId xmlns:a16="http://schemas.microsoft.com/office/drawing/2014/main" id="{216C970C-9FCE-3F59-8102-CBA1380B36D6}"/>
+                <a16:creationId xmlns:a16="http://schemas.microsoft.com/office/drawing/2014/main" id="{98D764D3-D6B7-C589-096F-DBE0D4092E10}"/>
               </a:ext>
             </a:extLst>
           </p:cNvPr>
@@ -617,7 +617,7 @@
           <p:cNvPr id="3" name="縦書きテキスト プレースホルダー 2">
             <a:extLst>
               <a:ext uri="{FF2B5EF4-FFF2-40B4-BE49-F238E27FC236}">
-                <a16:creationId xmlns:a16="http://schemas.microsoft.com/office/drawing/2014/main" id="{43B13F5F-5BDB-487B-95D0-14A8FBAD90BB}"/>
+                <a16:creationId xmlns:a16="http://schemas.microsoft.com/office/drawing/2014/main" id="{23A4A08A-07A9-298F-B621-575DE415144E}"/>
               </a:ext>
             </a:extLst>
           </p:cNvPr>
@@ -711,7 +711,7 @@
           <p:cNvPr id="4" name="日付プレースホルダー 3">
             <a:extLst>
               <a:ext uri="{FF2B5EF4-FFF2-40B4-BE49-F238E27FC236}">
-                <a16:creationId xmlns:a16="http://schemas.microsoft.com/office/drawing/2014/main" id="{17ED2651-DFB5-FFB6-B02E-6EE8AD2F71AB}"/>
+                <a16:creationId xmlns:a16="http://schemas.microsoft.com/office/drawing/2014/main" id="{047DF848-236C-E38F-D66A-6C0DE9E23947}"/>
               </a:ext>
             </a:extLst>
           </p:cNvPr>
@@ -727,7 +727,7 @@
           <a:bodyPr/>
           <a:lstStyle/>
           <a:p>
-            <a:fld id="{01263597-6936-4BB2-8D3D-31DB45F24DDB}" type="datetimeFigureOut">
+            <a:fld id="{D8827759-9E9D-4BCD-80EE-8117F6B69200}" type="datetimeFigureOut">
               <a:rPr kumimoji="1" lang="ja-JP" altLang="en-US" smtClean="0"/>
               <a:t>2026/7/30</a:t>
             </a:fld>
@@ -740,7 +740,7 @@
           <p:cNvPr id="5" name="フッター プレースホルダー 4">
             <a:extLst>
               <a:ext uri="{FF2B5EF4-FFF2-40B4-BE49-F238E27FC236}">
-                <a16:creationId xmlns:a16="http://schemas.microsoft.com/office/drawing/2014/main" id="{8AF30764-DF7C-FA7B-986F-C3EEA1E414CB}"/>
+                <a16:creationId xmlns:a16="http://schemas.microsoft.com/office/drawing/2014/main" id="{A9A386A0-18B3-62AD-42A8-C6A751C59AC8}"/>
               </a:ext>
             </a:extLst>
           </p:cNvPr>
@@ -765,7 +765,7 @@
           <p:cNvPr id="6" name="スライド番号プレースホルダー 5">
             <a:extLst>
               <a:ext uri="{FF2B5EF4-FFF2-40B4-BE49-F238E27FC236}">
-                <a16:creationId xmlns:a16="http://schemas.microsoft.com/office/drawing/2014/main" id="{3AFB93DD-21EC-31E2-CA15-9E15B29E71A0}"/>
+                <a16:creationId xmlns:a16="http://schemas.microsoft.com/office/drawing/2014/main" id="{AC7488BA-11F4-FE79-DE11-F938C62E467D}"/>
               </a:ext>
             </a:extLst>
           </p:cNvPr>
@@ -781,7 +781,7 @@
           <a:bodyPr/>
           <a:lstStyle/>
           <a:p>
-            <a:fld id="{739C73A2-29A2-471A-8A20-A8F5413FB700}" type="slidenum">
+            <a:fld id="{01F50A0A-288D-47A2-A2D6-08734344160D}" type="slidenum">
               <a:rPr kumimoji="1" lang="ja-JP" altLang="en-US" smtClean="0"/>
               <a:t>‹#›</a:t>
             </a:fld>
@@ -792,7 +792,7 @@
     </p:spTree>
     <p:extLst>
       <p:ext uri="{BB962C8B-B14F-4D97-AF65-F5344CB8AC3E}">
-        <p14:creationId xmlns:p14="http://schemas.microsoft.com/office/powerpoint/2010/main" val="3953115962"/>
+        <p14:creationId xmlns:p14="http://schemas.microsoft.com/office/powerpoint/2010/main" val="416536950"/>
       </p:ext>
     </p:extLst>
   </p:cSld>
@@ -824,7 +824,7 @@
           <p:cNvPr id="2" name="タイトル 1">
             <a:extLst>
               <a:ext uri="{FF2B5EF4-FFF2-40B4-BE49-F238E27FC236}">
-                <a16:creationId xmlns:a16="http://schemas.microsoft.com/office/drawing/2014/main" id="{1012EAF4-7D11-2EA3-7341-348084F0CED7}"/>
+                <a16:creationId xmlns:a16="http://schemas.microsoft.com/office/drawing/2014/main" id="{53236374-0EEA-167D-D57D-A4C83003FC11}"/>
               </a:ext>
             </a:extLst>
           </p:cNvPr>
@@ -852,7 +852,7 @@
           <p:cNvPr id="3" name="コンテンツ プレースホルダー 2">
             <a:extLst>
               <a:ext uri="{FF2B5EF4-FFF2-40B4-BE49-F238E27FC236}">
-                <a16:creationId xmlns:a16="http://schemas.microsoft.com/office/drawing/2014/main" id="{E2DF7ED3-FA21-5D59-2E7F-B84C41E89CE7}"/>
+                <a16:creationId xmlns:a16="http://schemas.microsoft.com/office/drawing/2014/main" id="{E0265ABF-6EC1-052C-226F-12E5AA063357}"/>
               </a:ext>
             </a:extLst>
           </p:cNvPr>
@@ -941,7 +941,7 @@
           <p:cNvPr id="4" name="日付プレースホルダー 3">
             <a:extLst>
               <a:ext uri="{FF2B5EF4-FFF2-40B4-BE49-F238E27FC236}">
-                <a16:creationId xmlns:a16="http://schemas.microsoft.com/office/drawing/2014/main" id="{74EEAD23-6F15-A449-19D5-880F0A50F665}"/>
+                <a16:creationId xmlns:a16="http://schemas.microsoft.com/office/drawing/2014/main" id="{12B255DD-4835-8E20-857A-86A9CA56C8B3}"/>
               </a:ext>
             </a:extLst>
           </p:cNvPr>
@@ -957,7 +957,7 @@
           <a:bodyPr/>
           <a:lstStyle/>
           <a:p>
-            <a:fld id="{01263597-6936-4BB2-8D3D-31DB45F24DDB}" type="datetimeFigureOut">
+            <a:fld id="{D8827759-9E9D-4BCD-80EE-8117F6B69200}" type="datetimeFigureOut">
               <a:rPr kumimoji="1" lang="ja-JP" altLang="en-US" smtClean="0"/>
               <a:t>2026/7/30</a:t>
             </a:fld>
@@ -970,7 +970,7 @@
           <p:cNvPr id="5" name="フッター プレースホルダー 4">
             <a:extLst>
               <a:ext uri="{FF2B5EF4-FFF2-40B4-BE49-F238E27FC236}">
-                <a16:creationId xmlns:a16="http://schemas.microsoft.com/office/drawing/2014/main" id="{9A41B867-3D46-E606-0F67-9EF336537C42}"/>
+                <a16:creationId xmlns:a16="http://schemas.microsoft.com/office/drawing/2014/main" id="{41D05CC6-889E-AE87-8545-129E41044D19}"/>
               </a:ext>
             </a:extLst>
           </p:cNvPr>
@@ -995,7 +995,7 @@
           <p:cNvPr id="6" name="スライド番号プレースホルダー 5">
             <a:extLst>
               <a:ext uri="{FF2B5EF4-FFF2-40B4-BE49-F238E27FC236}">
-                <a16:creationId xmlns:a16="http://schemas.microsoft.com/office/drawing/2014/main" id="{B0827610-784F-3CDA-997A-D24C25D6C7C6}"/>
+                <a16:creationId xmlns:a16="http://schemas.microsoft.com/office/drawing/2014/main" id="{9E7FDED1-97F2-9D0A-964D-20C48DB7AE12}"/>
               </a:ext>
             </a:extLst>
           </p:cNvPr>
@@ -1011,7 +1011,7 @@
           <a:bodyPr/>
           <a:lstStyle/>
           <a:p>
-            <a:fld id="{739C73A2-29A2-471A-8A20-A8F5413FB700}" type="slidenum">
+            <a:fld id="{01F50A0A-288D-47A2-A2D6-08734344160D}" type="slidenum">
               <a:rPr kumimoji="1" lang="ja-JP" altLang="en-US" smtClean="0"/>
               <a:t>‹#›</a:t>
             </a:fld>
@@ -1022,7 +1022,7 @@
     </p:spTree>
     <p:extLst>
       <p:ext uri="{BB962C8B-B14F-4D97-AF65-F5344CB8AC3E}">
-        <p14:creationId xmlns:p14="http://schemas.microsoft.com/office/powerpoint/2010/main" val="1960013094"/>
+        <p14:creationId xmlns:p14="http://schemas.microsoft.com/office/powerpoint/2010/main" val="4121661912"/>
       </p:ext>
     </p:extLst>
   </p:cSld>
@@ -1054,7 +1054,7 @@
           <p:cNvPr id="2" name="タイトル 1">
             <a:extLst>
               <a:ext uri="{FF2B5EF4-FFF2-40B4-BE49-F238E27FC236}">
-                <a16:creationId xmlns:a16="http://schemas.microsoft.com/office/drawing/2014/main" id="{A7D6D17C-41F4-D65A-F0B2-01472D598A8B}"/>
+                <a16:creationId xmlns:a16="http://schemas.microsoft.com/office/drawing/2014/main" id="{A02878EC-7F10-1E00-5C7E-AE52031989AD}"/>
               </a:ext>
             </a:extLst>
           </p:cNvPr>
@@ -1091,7 +1091,7 @@
           <p:cNvPr id="3" name="テキスト プレースホルダー 2">
             <a:extLst>
               <a:ext uri="{FF2B5EF4-FFF2-40B4-BE49-F238E27FC236}">
-                <a16:creationId xmlns:a16="http://schemas.microsoft.com/office/drawing/2014/main" id="{9301374F-5D47-F0C9-AC24-9D562507915A}"/>
+                <a16:creationId xmlns:a16="http://schemas.microsoft.com/office/drawing/2014/main" id="{73CD4C37-0D1D-3E7D-93CD-8B99A7E41E7E}"/>
               </a:ext>
             </a:extLst>
           </p:cNvPr>
@@ -1216,7 +1216,7 @@
           <p:cNvPr id="4" name="日付プレースホルダー 3">
             <a:extLst>
               <a:ext uri="{FF2B5EF4-FFF2-40B4-BE49-F238E27FC236}">
-                <a16:creationId xmlns:a16="http://schemas.microsoft.com/office/drawing/2014/main" id="{38ED7B6E-2043-88BF-DA0C-F661FCDE7648}"/>
+                <a16:creationId xmlns:a16="http://schemas.microsoft.com/office/drawing/2014/main" id="{A346633F-2F35-E18D-F51E-FA47B117B6CD}"/>
               </a:ext>
             </a:extLst>
           </p:cNvPr>
@@ -1232,7 +1232,7 @@
           <a:bodyPr/>
           <a:lstStyle/>
           <a:p>
-            <a:fld id="{01263597-6936-4BB2-8D3D-31DB45F24DDB}" type="datetimeFigureOut">
+            <a:fld id="{D8827759-9E9D-4BCD-80EE-8117F6B69200}" type="datetimeFigureOut">
               <a:rPr kumimoji="1" lang="ja-JP" altLang="en-US" smtClean="0"/>
               <a:t>2026/7/30</a:t>
             </a:fld>
@@ -1245,7 +1245,7 @@
           <p:cNvPr id="5" name="フッター プレースホルダー 4">
             <a:extLst>
               <a:ext uri="{FF2B5EF4-FFF2-40B4-BE49-F238E27FC236}">
-                <a16:creationId xmlns:a16="http://schemas.microsoft.com/office/drawing/2014/main" id="{444842BB-47FD-AB28-3E29-DF8D49480059}"/>
+                <a16:creationId xmlns:a16="http://schemas.microsoft.com/office/drawing/2014/main" id="{5CCB05E5-0D5E-C9CD-BFA1-2E313C74074A}"/>
               </a:ext>
             </a:extLst>
           </p:cNvPr>
@@ -1270,7 +1270,7 @@
           <p:cNvPr id="6" name="スライド番号プレースホルダー 5">
             <a:extLst>
               <a:ext uri="{FF2B5EF4-FFF2-40B4-BE49-F238E27FC236}">
-                <a16:creationId xmlns:a16="http://schemas.microsoft.com/office/drawing/2014/main" id="{45ED1A3E-B2AF-7C16-8B51-70C71CA5EBA5}"/>
+                <a16:creationId xmlns:a16="http://schemas.microsoft.com/office/drawing/2014/main" id="{B2509D55-D855-8002-8CC5-8193D811648D}"/>
               </a:ext>
             </a:extLst>
           </p:cNvPr>
@@ -1286,7 +1286,7 @@
           <a:bodyPr/>
           <a:lstStyle/>
           <a:p>
-            <a:fld id="{739C73A2-29A2-471A-8A20-A8F5413FB700}" type="slidenum">
+            <a:fld id="{01F50A0A-288D-47A2-A2D6-08734344160D}" type="slidenum">
               <a:rPr kumimoji="1" lang="ja-JP" altLang="en-US" smtClean="0"/>
               <a:t>‹#›</a:t>
             </a:fld>
@@ -1297,7 +1297,7 @@
     </p:spTree>
     <p:extLst>
       <p:ext uri="{BB962C8B-B14F-4D97-AF65-F5344CB8AC3E}">
-        <p14:creationId xmlns:p14="http://schemas.microsoft.com/office/powerpoint/2010/main" val="933936844"/>
+        <p14:creationId xmlns:p14="http://schemas.microsoft.com/office/powerpoint/2010/main" val="3502188902"/>
       </p:ext>
     </p:extLst>
   </p:cSld>
@@ -1329,7 +1329,7 @@
           <p:cNvPr id="2" name="タイトル 1">
             <a:extLst>
               <a:ext uri="{FF2B5EF4-FFF2-40B4-BE49-F238E27FC236}">
-                <a16:creationId xmlns:a16="http://schemas.microsoft.com/office/drawing/2014/main" id="{42D5EA0E-7608-FEDF-8116-15C8B4624D38}"/>
+                <a16:creationId xmlns:a16="http://schemas.microsoft.com/office/drawing/2014/main" id="{01CC19A8-A4C6-FBC4-3C81-D1E4EDE18E2A}"/>
               </a:ext>
             </a:extLst>
           </p:cNvPr>
@@ -1357,7 +1357,7 @@
           <p:cNvPr id="3" name="コンテンツ プレースホルダー 2">
             <a:extLst>
               <a:ext uri="{FF2B5EF4-FFF2-40B4-BE49-F238E27FC236}">
-                <a16:creationId xmlns:a16="http://schemas.microsoft.com/office/drawing/2014/main" id="{94356E90-02E8-4B52-6A6C-EEA830EFF86B}"/>
+                <a16:creationId xmlns:a16="http://schemas.microsoft.com/office/drawing/2014/main" id="{0E400AF3-DBF9-4CB5-AE76-3942A768AD86}"/>
               </a:ext>
             </a:extLst>
           </p:cNvPr>
@@ -1451,7 +1451,7 @@
           <p:cNvPr id="4" name="コンテンツ プレースホルダー 3">
             <a:extLst>
               <a:ext uri="{FF2B5EF4-FFF2-40B4-BE49-F238E27FC236}">
-                <a16:creationId xmlns:a16="http://schemas.microsoft.com/office/drawing/2014/main" id="{1D90012B-E706-B635-E0A6-4FA6CD64A9DB}"/>
+                <a16:creationId xmlns:a16="http://schemas.microsoft.com/office/drawing/2014/main" id="{F6086E8F-5870-0B6A-69AA-1663B66BB143}"/>
               </a:ext>
             </a:extLst>
           </p:cNvPr>
@@ -1545,7 +1545,7 @@
           <p:cNvPr id="5" name="日付プレースホルダー 4">
             <a:extLst>
               <a:ext uri="{FF2B5EF4-FFF2-40B4-BE49-F238E27FC236}">
-                <a16:creationId xmlns:a16="http://schemas.microsoft.com/office/drawing/2014/main" id="{8980E69A-72E9-7FC0-049C-866B68CA0EE1}"/>
+                <a16:creationId xmlns:a16="http://schemas.microsoft.com/office/drawing/2014/main" id="{1708211F-BD72-2EAA-BE96-28D7317EBF62}"/>
               </a:ext>
             </a:extLst>
           </p:cNvPr>
@@ -1561,7 +1561,7 @@
           <a:bodyPr/>
           <a:lstStyle/>
           <a:p>
-            <a:fld id="{01263597-6936-4BB2-8D3D-31DB45F24DDB}" type="datetimeFigureOut">
+            <a:fld id="{D8827759-9E9D-4BCD-80EE-8117F6B69200}" type="datetimeFigureOut">
               <a:rPr kumimoji="1" lang="ja-JP" altLang="en-US" smtClean="0"/>
               <a:t>2026/7/30</a:t>
             </a:fld>
@@ -1574,7 +1574,7 @@
           <p:cNvPr id="6" name="フッター プレースホルダー 5">
             <a:extLst>
               <a:ext uri="{FF2B5EF4-FFF2-40B4-BE49-F238E27FC236}">
-                <a16:creationId xmlns:a16="http://schemas.microsoft.com/office/drawing/2014/main" id="{68486F02-E535-77C8-7693-E9E2314B0F12}"/>
+                <a16:creationId xmlns:a16="http://schemas.microsoft.com/office/drawing/2014/main" id="{2D383882-9C03-4D99-2897-4B2EACB56270}"/>
               </a:ext>
             </a:extLst>
           </p:cNvPr>
@@ -1599,7 +1599,7 @@
           <p:cNvPr id="7" name="スライド番号プレースホルダー 6">
             <a:extLst>
               <a:ext uri="{FF2B5EF4-FFF2-40B4-BE49-F238E27FC236}">
-                <a16:creationId xmlns:a16="http://schemas.microsoft.com/office/drawing/2014/main" id="{048C54DB-72B2-E538-6719-0E2FF08A0A74}"/>
+                <a16:creationId xmlns:a16="http://schemas.microsoft.com/office/drawing/2014/main" id="{2A4498FC-0A34-23B0-93D0-07400C330995}"/>
               </a:ext>
             </a:extLst>
           </p:cNvPr>
@@ -1615,7 +1615,7 @@
           <a:bodyPr/>
           <a:lstStyle/>
           <a:p>
-            <a:fld id="{739C73A2-29A2-471A-8A20-A8F5413FB700}" type="slidenum">
+            <a:fld id="{01F50A0A-288D-47A2-A2D6-08734344160D}" type="slidenum">
               <a:rPr kumimoji="1" lang="ja-JP" altLang="en-US" smtClean="0"/>
               <a:t>‹#›</a:t>
             </a:fld>
@@ -1626,7 +1626,7 @@
     </p:spTree>
     <p:extLst>
       <p:ext uri="{BB962C8B-B14F-4D97-AF65-F5344CB8AC3E}">
-        <p14:creationId xmlns:p14="http://schemas.microsoft.com/office/powerpoint/2010/main" val="2449922561"/>
+        <p14:creationId xmlns:p14="http://schemas.microsoft.com/office/powerpoint/2010/main" val="1962497205"/>
       </p:ext>
     </p:extLst>
   </p:cSld>
@@ -1658,7 +1658,7 @@
           <p:cNvPr id="2" name="タイトル 1">
             <a:extLst>
               <a:ext uri="{FF2B5EF4-FFF2-40B4-BE49-F238E27FC236}">
-                <a16:creationId xmlns:a16="http://schemas.microsoft.com/office/drawing/2014/main" id="{F5298809-FA76-C0B6-8250-1C246C4F633B}"/>
+                <a16:creationId xmlns:a16="http://schemas.microsoft.com/office/drawing/2014/main" id="{EBB529C6-FA42-C0DC-B440-43DC34550C59}"/>
               </a:ext>
             </a:extLst>
           </p:cNvPr>
@@ -1691,7 +1691,7 @@
           <p:cNvPr id="3" name="テキスト プレースホルダー 2">
             <a:extLst>
               <a:ext uri="{FF2B5EF4-FFF2-40B4-BE49-F238E27FC236}">
-                <a16:creationId xmlns:a16="http://schemas.microsoft.com/office/drawing/2014/main" id="{CA714DB1-9C93-7D8D-D162-E9595BA5EDBA}"/>
+                <a16:creationId xmlns:a16="http://schemas.microsoft.com/office/drawing/2014/main" id="{8D669DC4-1597-FD53-6ECA-5139C520DB25}"/>
               </a:ext>
             </a:extLst>
           </p:cNvPr>
@@ -1762,7 +1762,7 @@
           <p:cNvPr id="4" name="コンテンツ プレースホルダー 3">
             <a:extLst>
               <a:ext uri="{FF2B5EF4-FFF2-40B4-BE49-F238E27FC236}">
-                <a16:creationId xmlns:a16="http://schemas.microsoft.com/office/drawing/2014/main" id="{8594287F-21AA-3F0C-8A0C-6F85CB7573C0}"/>
+                <a16:creationId xmlns:a16="http://schemas.microsoft.com/office/drawing/2014/main" id="{FBDB8D14-40E8-5874-1200-EA4FAB9139BC}"/>
               </a:ext>
             </a:extLst>
           </p:cNvPr>
@@ -1856,7 +1856,7 @@
           <p:cNvPr id="5" name="テキスト プレースホルダー 4">
             <a:extLst>
               <a:ext uri="{FF2B5EF4-FFF2-40B4-BE49-F238E27FC236}">
-                <a16:creationId xmlns:a16="http://schemas.microsoft.com/office/drawing/2014/main" id="{A137506B-6B6C-5285-CDE9-D4F818F7D247}"/>
+                <a16:creationId xmlns:a16="http://schemas.microsoft.com/office/drawing/2014/main" id="{A08678E4-3AA0-626E-A5ED-7458EF8E3E1E}"/>
               </a:ext>
             </a:extLst>
           </p:cNvPr>
@@ -1927,7 +1927,7 @@
           <p:cNvPr id="6" name="コンテンツ プレースホルダー 5">
             <a:extLst>
               <a:ext uri="{FF2B5EF4-FFF2-40B4-BE49-F238E27FC236}">
-                <a16:creationId xmlns:a16="http://schemas.microsoft.com/office/drawing/2014/main" id="{E0588441-E605-D5C7-2B7A-FD652E58CAEB}"/>
+                <a16:creationId xmlns:a16="http://schemas.microsoft.com/office/drawing/2014/main" id="{21372D9A-DD3D-FF83-8164-864B9D69F771}"/>
               </a:ext>
             </a:extLst>
           </p:cNvPr>
@@ -2021,7 +2021,7 @@
           <p:cNvPr id="7" name="日付プレースホルダー 6">
             <a:extLst>
               <a:ext uri="{FF2B5EF4-FFF2-40B4-BE49-F238E27FC236}">
-                <a16:creationId xmlns:a16="http://schemas.microsoft.com/office/drawing/2014/main" id="{345B29FB-7E53-573F-9A7D-84FA8AD2E95F}"/>
+                <a16:creationId xmlns:a16="http://schemas.microsoft.com/office/drawing/2014/main" id="{9CA2C413-2DF0-2621-5DA4-3994DD330BFC}"/>
               </a:ext>
             </a:extLst>
           </p:cNvPr>
@@ -2037,7 +2037,7 @@
           <a:bodyPr/>
           <a:lstStyle/>
           <a:p>
-            <a:fld id="{01263597-6936-4BB2-8D3D-31DB45F24DDB}" type="datetimeFigureOut">
+            <a:fld id="{D8827759-9E9D-4BCD-80EE-8117F6B69200}" type="datetimeFigureOut">
               <a:rPr kumimoji="1" lang="ja-JP" altLang="en-US" smtClean="0"/>
               <a:t>2026/7/30</a:t>
             </a:fld>
@@ -2050,7 +2050,7 @@
           <p:cNvPr id="8" name="フッター プレースホルダー 7">
             <a:extLst>
               <a:ext uri="{FF2B5EF4-FFF2-40B4-BE49-F238E27FC236}">
-                <a16:creationId xmlns:a16="http://schemas.microsoft.com/office/drawing/2014/main" id="{D55AF4F1-0C30-9717-444F-A88E18D30322}"/>
+                <a16:creationId xmlns:a16="http://schemas.microsoft.com/office/drawing/2014/main" id="{28DA837B-0E5A-5F56-6B75-6DAEE77E8683}"/>
               </a:ext>
             </a:extLst>
           </p:cNvPr>
@@ -2075,7 +2075,7 @@
           <p:cNvPr id="9" name="スライド番号プレースホルダー 8">
             <a:extLst>
               <a:ext uri="{FF2B5EF4-FFF2-40B4-BE49-F238E27FC236}">
-                <a16:creationId xmlns:a16="http://schemas.microsoft.com/office/drawing/2014/main" id="{E4376447-0F90-6FA7-F52A-A2A29DDB0847}"/>
+                <a16:creationId xmlns:a16="http://schemas.microsoft.com/office/drawing/2014/main" id="{37CF3825-9111-CAB6-639A-F7B0B6E58A59}"/>
               </a:ext>
             </a:extLst>
           </p:cNvPr>
@@ -2091,7 +2091,7 @@
           <a:bodyPr/>
           <a:lstStyle/>
           <a:p>
-            <a:fld id="{739C73A2-29A2-471A-8A20-A8F5413FB700}" type="slidenum">
+            <a:fld id="{01F50A0A-288D-47A2-A2D6-08734344160D}" type="slidenum">
               <a:rPr kumimoji="1" lang="ja-JP" altLang="en-US" smtClean="0"/>
               <a:t>‹#›</a:t>
             </a:fld>
@@ -2102,7 +2102,7 @@
     </p:spTree>
     <p:extLst>
       <p:ext uri="{BB962C8B-B14F-4D97-AF65-F5344CB8AC3E}">
-        <p14:creationId xmlns:p14="http://schemas.microsoft.com/office/powerpoint/2010/main" val="371391811"/>
+        <p14:creationId xmlns:p14="http://schemas.microsoft.com/office/powerpoint/2010/main" val="1563035381"/>
       </p:ext>
     </p:extLst>
   </p:cSld>
@@ -2134,7 +2134,7 @@
           <p:cNvPr id="2" name="タイトル 1">
             <a:extLst>
               <a:ext uri="{FF2B5EF4-FFF2-40B4-BE49-F238E27FC236}">
-                <a16:creationId xmlns:a16="http://schemas.microsoft.com/office/drawing/2014/main" id="{A0999BBA-2703-A5C1-B326-B57547D17F38}"/>
+                <a16:creationId xmlns:a16="http://schemas.microsoft.com/office/drawing/2014/main" id="{DD207322-E438-D566-4585-EC7239A825ED}"/>
               </a:ext>
             </a:extLst>
           </p:cNvPr>
@@ -2162,7 +2162,7 @@
           <p:cNvPr id="3" name="日付プレースホルダー 2">
             <a:extLst>
               <a:ext uri="{FF2B5EF4-FFF2-40B4-BE49-F238E27FC236}">
-                <a16:creationId xmlns:a16="http://schemas.microsoft.com/office/drawing/2014/main" id="{2F7E52F5-5646-C167-266B-468A76356EAB}"/>
+                <a16:creationId xmlns:a16="http://schemas.microsoft.com/office/drawing/2014/main" id="{2C6734A2-8DE5-3AB0-FDD3-132868539EAC}"/>
               </a:ext>
             </a:extLst>
           </p:cNvPr>
@@ -2178,7 +2178,7 @@
           <a:bodyPr/>
           <a:lstStyle/>
           <a:p>
-            <a:fld id="{01263597-6936-4BB2-8D3D-31DB45F24DDB}" type="datetimeFigureOut">
+            <a:fld id="{D8827759-9E9D-4BCD-80EE-8117F6B69200}" type="datetimeFigureOut">
               <a:rPr kumimoji="1" lang="ja-JP" altLang="en-US" smtClean="0"/>
               <a:t>2026/7/30</a:t>
             </a:fld>
@@ -2191,7 +2191,7 @@
           <p:cNvPr id="4" name="フッター プレースホルダー 3">
             <a:extLst>
               <a:ext uri="{FF2B5EF4-FFF2-40B4-BE49-F238E27FC236}">
-                <a16:creationId xmlns:a16="http://schemas.microsoft.com/office/drawing/2014/main" id="{02E29E1F-4679-81BF-62FC-79523BE2CDAB}"/>
+                <a16:creationId xmlns:a16="http://schemas.microsoft.com/office/drawing/2014/main" id="{5ABF818F-973B-423D-F8A2-AB3F23BDF610}"/>
               </a:ext>
             </a:extLst>
           </p:cNvPr>
@@ -2216,7 +2216,7 @@
           <p:cNvPr id="5" name="スライド番号プレースホルダー 4">
             <a:extLst>
               <a:ext uri="{FF2B5EF4-FFF2-40B4-BE49-F238E27FC236}">
-                <a16:creationId xmlns:a16="http://schemas.microsoft.com/office/drawing/2014/main" id="{41286E48-696D-39E6-D1C4-AE401D77100A}"/>
+                <a16:creationId xmlns:a16="http://schemas.microsoft.com/office/drawing/2014/main" id="{0A39343E-9EE1-6949-5706-2DB4415553FB}"/>
               </a:ext>
             </a:extLst>
           </p:cNvPr>
@@ -2232,7 +2232,7 @@
           <a:bodyPr/>
           <a:lstStyle/>
           <a:p>
-            <a:fld id="{739C73A2-29A2-471A-8A20-A8F5413FB700}" type="slidenum">
+            <a:fld id="{01F50A0A-288D-47A2-A2D6-08734344160D}" type="slidenum">
               <a:rPr kumimoji="1" lang="ja-JP" altLang="en-US" smtClean="0"/>
               <a:t>‹#›</a:t>
             </a:fld>
@@ -2243,7 +2243,7 @@
     </p:spTree>
     <p:extLst>
       <p:ext uri="{BB962C8B-B14F-4D97-AF65-F5344CB8AC3E}">
-        <p14:creationId xmlns:p14="http://schemas.microsoft.com/office/powerpoint/2010/main" val="763627605"/>
+        <p14:creationId xmlns:p14="http://schemas.microsoft.com/office/powerpoint/2010/main" val="590880300"/>
       </p:ext>
     </p:extLst>
   </p:cSld>
@@ -2275,7 +2275,7 @@
           <p:cNvPr id="2" name="日付プレースホルダー 1">
             <a:extLst>
               <a:ext uri="{FF2B5EF4-FFF2-40B4-BE49-F238E27FC236}">
-                <a16:creationId xmlns:a16="http://schemas.microsoft.com/office/drawing/2014/main" id="{53BDAB9C-DF1B-942D-A705-8763DC3E38B0}"/>
+                <a16:creationId xmlns:a16="http://schemas.microsoft.com/office/drawing/2014/main" id="{C50E115C-72F0-B9FA-17CA-19C27A644DA7}"/>
               </a:ext>
             </a:extLst>
           </p:cNvPr>
@@ -2291,7 +2291,7 @@
           <a:bodyPr/>
           <a:lstStyle/>
           <a:p>
-            <a:fld id="{01263597-6936-4BB2-8D3D-31DB45F24DDB}" type="datetimeFigureOut">
+            <a:fld id="{D8827759-9E9D-4BCD-80EE-8117F6B69200}" type="datetimeFigureOut">
               <a:rPr kumimoji="1" lang="ja-JP" altLang="en-US" smtClean="0"/>
               <a:t>2026/7/30</a:t>
             </a:fld>
@@ -2304,7 +2304,7 @@
           <p:cNvPr id="3" name="フッター プレースホルダー 2">
             <a:extLst>
               <a:ext uri="{FF2B5EF4-FFF2-40B4-BE49-F238E27FC236}">
-                <a16:creationId xmlns:a16="http://schemas.microsoft.com/office/drawing/2014/main" id="{E4EE96B0-F589-55EA-EB3C-84E01C00ADD8}"/>
+                <a16:creationId xmlns:a16="http://schemas.microsoft.com/office/drawing/2014/main" id="{EE81828E-788C-AFCD-17BD-0BF0BB1652B0}"/>
               </a:ext>
             </a:extLst>
           </p:cNvPr>
@@ -2329,7 +2329,7 @@
           <p:cNvPr id="4" name="スライド番号プレースホルダー 3">
             <a:extLst>
               <a:ext uri="{FF2B5EF4-FFF2-40B4-BE49-F238E27FC236}">
-                <a16:creationId xmlns:a16="http://schemas.microsoft.com/office/drawing/2014/main" id="{67A701CD-35B0-19D1-11AC-CD697ADB06AE}"/>
+                <a16:creationId xmlns:a16="http://schemas.microsoft.com/office/drawing/2014/main" id="{055D2597-EF02-F14C-C15C-DAA9FC946D4B}"/>
               </a:ext>
             </a:extLst>
           </p:cNvPr>
@@ -2345,7 +2345,7 @@
           <a:bodyPr/>
           <a:lstStyle/>
           <a:p>
-            <a:fld id="{739C73A2-29A2-471A-8A20-A8F5413FB700}" type="slidenum">
+            <a:fld id="{01F50A0A-288D-47A2-A2D6-08734344160D}" type="slidenum">
               <a:rPr kumimoji="1" lang="ja-JP" altLang="en-US" smtClean="0"/>
               <a:t>‹#›</a:t>
             </a:fld>
@@ -2356,7 +2356,7 @@
     </p:spTree>
     <p:extLst>
       <p:ext uri="{BB962C8B-B14F-4D97-AF65-F5344CB8AC3E}">
-        <p14:creationId xmlns:p14="http://schemas.microsoft.com/office/powerpoint/2010/main" val="1401630435"/>
+        <p14:creationId xmlns:p14="http://schemas.microsoft.com/office/powerpoint/2010/main" val="1857825082"/>
       </p:ext>
     </p:extLst>
   </p:cSld>
@@ -2388,7 +2388,7 @@
           <p:cNvPr id="2" name="タイトル 1">
             <a:extLst>
               <a:ext uri="{FF2B5EF4-FFF2-40B4-BE49-F238E27FC236}">
-                <a16:creationId xmlns:a16="http://schemas.microsoft.com/office/drawing/2014/main" id="{FEFAC3D8-9CD8-52EC-E53A-F072B164F279}"/>
+                <a16:creationId xmlns:a16="http://schemas.microsoft.com/office/drawing/2014/main" id="{D27AB101-EEC1-C756-679D-62AFAB403251}"/>
               </a:ext>
             </a:extLst>
           </p:cNvPr>
@@ -2425,7 +2425,7 @@
           <p:cNvPr id="3" name="コンテンツ プレースホルダー 2">
             <a:extLst>
               <a:ext uri="{FF2B5EF4-FFF2-40B4-BE49-F238E27FC236}">
-                <a16:creationId xmlns:a16="http://schemas.microsoft.com/office/drawing/2014/main" id="{0AE27011-001E-153C-31A3-CFC2545EE1E1}"/>
+                <a16:creationId xmlns:a16="http://schemas.microsoft.com/office/drawing/2014/main" id="{5B45AF58-3446-A34D-A3BB-52B03CCCE543}"/>
               </a:ext>
             </a:extLst>
           </p:cNvPr>
@@ -2547,7 +2547,7 @@
           <p:cNvPr id="4" name="テキスト プレースホルダー 3">
             <a:extLst>
               <a:ext uri="{FF2B5EF4-FFF2-40B4-BE49-F238E27FC236}">
-                <a16:creationId xmlns:a16="http://schemas.microsoft.com/office/drawing/2014/main" id="{AD847587-F190-C03F-0E0A-69374C479BE4}"/>
+                <a16:creationId xmlns:a16="http://schemas.microsoft.com/office/drawing/2014/main" id="{07AFEDCD-2D59-CCB1-1789-4203C647D537}"/>
               </a:ext>
             </a:extLst>
           </p:cNvPr>
@@ -2618,7 +2618,7 @@
           <p:cNvPr id="5" name="日付プレースホルダー 4">
             <a:extLst>
               <a:ext uri="{FF2B5EF4-FFF2-40B4-BE49-F238E27FC236}">
-                <a16:creationId xmlns:a16="http://schemas.microsoft.com/office/drawing/2014/main" id="{99A6AA82-BC2D-8DF1-255D-4435DDC5AFE7}"/>
+                <a16:creationId xmlns:a16="http://schemas.microsoft.com/office/drawing/2014/main" id="{0EF3CB05-E7E2-4EA2-936D-73A8E6696306}"/>
               </a:ext>
             </a:extLst>
           </p:cNvPr>
@@ -2634,7 +2634,7 @@
           <a:bodyPr/>
           <a:lstStyle/>
           <a:p>
-            <a:fld id="{01263597-6936-4BB2-8D3D-31DB45F24DDB}" type="datetimeFigureOut">
+            <a:fld id="{D8827759-9E9D-4BCD-80EE-8117F6B69200}" type="datetimeFigureOut">
               <a:rPr kumimoji="1" lang="ja-JP" altLang="en-US" smtClean="0"/>
               <a:t>2026/7/30</a:t>
             </a:fld>
@@ -2647,7 +2647,7 @@
           <p:cNvPr id="6" name="フッター プレースホルダー 5">
             <a:extLst>
               <a:ext uri="{FF2B5EF4-FFF2-40B4-BE49-F238E27FC236}">
-                <a16:creationId xmlns:a16="http://schemas.microsoft.com/office/drawing/2014/main" id="{7D06AB00-1BDC-0EF5-C658-F7086CA75885}"/>
+                <a16:creationId xmlns:a16="http://schemas.microsoft.com/office/drawing/2014/main" id="{A1916668-AB24-119B-3D6E-98D4CD12614E}"/>
               </a:ext>
             </a:extLst>
           </p:cNvPr>
@@ -2672,7 +2672,7 @@
           <p:cNvPr id="7" name="スライド番号プレースホルダー 6">
             <a:extLst>
               <a:ext uri="{FF2B5EF4-FFF2-40B4-BE49-F238E27FC236}">
-                <a16:creationId xmlns:a16="http://schemas.microsoft.com/office/drawing/2014/main" id="{F68C6E50-5579-F078-F2D1-B6DA79D39EED}"/>
+                <a16:creationId xmlns:a16="http://schemas.microsoft.com/office/drawing/2014/main" id="{4D961FD9-14F7-C03E-F2F3-F9A2D8ABA58D}"/>
               </a:ext>
             </a:extLst>
           </p:cNvPr>
@@ -2688,7 +2688,7 @@
           <a:bodyPr/>
           <a:lstStyle/>
           <a:p>
-            <a:fld id="{739C73A2-29A2-471A-8A20-A8F5413FB700}" type="slidenum">
+            <a:fld id="{01F50A0A-288D-47A2-A2D6-08734344160D}" type="slidenum">
               <a:rPr kumimoji="1" lang="ja-JP" altLang="en-US" smtClean="0"/>
               <a:t>‹#›</a:t>
             </a:fld>
@@ -2699,7 +2699,7 @@
     </p:spTree>
     <p:extLst>
       <p:ext uri="{BB962C8B-B14F-4D97-AF65-F5344CB8AC3E}">
-        <p14:creationId xmlns:p14="http://schemas.microsoft.com/office/powerpoint/2010/main" val="3522010573"/>
+        <p14:creationId xmlns:p14="http://schemas.microsoft.com/office/powerpoint/2010/main" val="654439886"/>
       </p:ext>
     </p:extLst>
   </p:cSld>
@@ -2731,7 +2731,7 @@
           <p:cNvPr id="2" name="タイトル 1">
             <a:extLst>
               <a:ext uri="{FF2B5EF4-FFF2-40B4-BE49-F238E27FC236}">
-                <a16:creationId xmlns:a16="http://schemas.microsoft.com/office/drawing/2014/main" id="{300D2781-C657-8C8B-6EF3-0591E20E64A7}"/>
+                <a16:creationId xmlns:a16="http://schemas.microsoft.com/office/drawing/2014/main" id="{A1E08272-6CA6-68EA-65E7-773047B6ED02}"/>
               </a:ext>
             </a:extLst>
           </p:cNvPr>
@@ -2768,7 +2768,7 @@
           <p:cNvPr id="3" name="図プレースホルダー 2">
             <a:extLst>
               <a:ext uri="{FF2B5EF4-FFF2-40B4-BE49-F238E27FC236}">
-                <a16:creationId xmlns:a16="http://schemas.microsoft.com/office/drawing/2014/main" id="{2E9C81AE-7A59-64BA-C4B1-EE4BC6E460A4}"/>
+                <a16:creationId xmlns:a16="http://schemas.microsoft.com/office/drawing/2014/main" id="{7FC1305A-4A6E-1D8F-E733-403B0B949D7B}"/>
               </a:ext>
             </a:extLst>
           </p:cNvPr>
@@ -2835,7 +2835,7 @@
           <p:cNvPr id="4" name="テキスト プレースホルダー 3">
             <a:extLst>
               <a:ext uri="{FF2B5EF4-FFF2-40B4-BE49-F238E27FC236}">
-                <a16:creationId xmlns:a16="http://schemas.microsoft.com/office/drawing/2014/main" id="{4C23E086-947A-C928-5C3B-0EE590F4ADC9}"/>
+                <a16:creationId xmlns:a16="http://schemas.microsoft.com/office/drawing/2014/main" id="{4DD5DA4E-A062-20A2-9560-DDC7A915DB8B}"/>
               </a:ext>
             </a:extLst>
           </p:cNvPr>
@@ -2906,7 +2906,7 @@
           <p:cNvPr id="5" name="日付プレースホルダー 4">
             <a:extLst>
               <a:ext uri="{FF2B5EF4-FFF2-40B4-BE49-F238E27FC236}">
-                <a16:creationId xmlns:a16="http://schemas.microsoft.com/office/drawing/2014/main" id="{3A6ADA64-D966-130A-4BEE-12DA28C3E555}"/>
+                <a16:creationId xmlns:a16="http://schemas.microsoft.com/office/drawing/2014/main" id="{A25FABCB-7B08-CECD-2CAE-5979A39C5925}"/>
               </a:ext>
             </a:extLst>
           </p:cNvPr>
@@ -2922,7 +2922,7 @@
           <a:bodyPr/>
           <a:lstStyle/>
           <a:p>
-            <a:fld id="{01263597-6936-4BB2-8D3D-31DB45F24DDB}" type="datetimeFigureOut">
+            <a:fld id="{D8827759-9E9D-4BCD-80EE-8117F6B69200}" type="datetimeFigureOut">
               <a:rPr kumimoji="1" lang="ja-JP" altLang="en-US" smtClean="0"/>
               <a:t>2026/7/30</a:t>
             </a:fld>
@@ -2935,7 +2935,7 @@
           <p:cNvPr id="6" name="フッター プレースホルダー 5">
             <a:extLst>
               <a:ext uri="{FF2B5EF4-FFF2-40B4-BE49-F238E27FC236}">
-                <a16:creationId xmlns:a16="http://schemas.microsoft.com/office/drawing/2014/main" id="{EFB79C47-1DA2-CF84-AB07-05DE154461EF}"/>
+                <a16:creationId xmlns:a16="http://schemas.microsoft.com/office/drawing/2014/main" id="{12C9DD15-8BA5-C7D0-AE3B-64C2C72A1AC1}"/>
               </a:ext>
             </a:extLst>
           </p:cNvPr>
@@ -2960,7 +2960,7 @@
           <p:cNvPr id="7" name="スライド番号プレースホルダー 6">
             <a:extLst>
               <a:ext uri="{FF2B5EF4-FFF2-40B4-BE49-F238E27FC236}">
-                <a16:creationId xmlns:a16="http://schemas.microsoft.com/office/drawing/2014/main" id="{8DBF206F-B182-5F37-0000-D6CE34AE0702}"/>
+                <a16:creationId xmlns:a16="http://schemas.microsoft.com/office/drawing/2014/main" id="{E1B333DC-E355-0FB2-89A7-10B184BBAE89}"/>
               </a:ext>
             </a:extLst>
           </p:cNvPr>
@@ -2976,7 +2976,7 @@
           <a:bodyPr/>
           <a:lstStyle/>
           <a:p>
-            <a:fld id="{739C73A2-29A2-471A-8A20-A8F5413FB700}" type="slidenum">
+            <a:fld id="{01F50A0A-288D-47A2-A2D6-08734344160D}" type="slidenum">
               <a:rPr kumimoji="1" lang="ja-JP" altLang="en-US" smtClean="0"/>
               <a:t>‹#›</a:t>
             </a:fld>
@@ -2987,7 +2987,7 @@
     </p:spTree>
     <p:extLst>
       <p:ext uri="{BB962C8B-B14F-4D97-AF65-F5344CB8AC3E}">
-        <p14:creationId xmlns:p14="http://schemas.microsoft.com/office/powerpoint/2010/main" val="4260543315"/>
+        <p14:creationId xmlns:p14="http://schemas.microsoft.com/office/powerpoint/2010/main" val="2246561315"/>
       </p:ext>
     </p:extLst>
   </p:cSld>
@@ -3024,7 +3024,7 @@
           <p:cNvPr id="2" name="タイトル プレースホルダー 1">
             <a:extLst>
               <a:ext uri="{FF2B5EF4-FFF2-40B4-BE49-F238E27FC236}">
-                <a16:creationId xmlns:a16="http://schemas.microsoft.com/office/drawing/2014/main" id="{C374DECD-5E94-2CB4-629F-0092E20F96F3}"/>
+                <a16:creationId xmlns:a16="http://schemas.microsoft.com/office/drawing/2014/main" id="{6D821A8C-29C1-CE41-41C9-2B185AC63C3F}"/>
               </a:ext>
             </a:extLst>
           </p:cNvPr>
@@ -3062,7 +3062,7 @@
           <p:cNvPr id="3" name="テキスト プレースホルダー 2">
             <a:extLst>
               <a:ext uri="{FF2B5EF4-FFF2-40B4-BE49-F238E27FC236}">
-                <a16:creationId xmlns:a16="http://schemas.microsoft.com/office/drawing/2014/main" id="{CE3EC55F-CBC4-D974-A130-174D394E1B31}"/>
+                <a16:creationId xmlns:a16="http://schemas.microsoft.com/office/drawing/2014/main" id="{2AD91464-50B9-A16F-A584-0ECCDE43F833}"/>
               </a:ext>
             </a:extLst>
           </p:cNvPr>
@@ -3161,7 +3161,7 @@
           <p:cNvPr id="4" name="日付プレースホルダー 3">
             <a:extLst>
               <a:ext uri="{FF2B5EF4-FFF2-40B4-BE49-F238E27FC236}">
-                <a16:creationId xmlns:a16="http://schemas.microsoft.com/office/drawing/2014/main" id="{B5F4FB97-B998-D7AE-BC24-8F8634B760F6}"/>
+                <a16:creationId xmlns:a16="http://schemas.microsoft.com/office/drawing/2014/main" id="{FDAA36F7-3A65-9799-D584-B8E818D62423}"/>
               </a:ext>
             </a:extLst>
           </p:cNvPr>
@@ -3195,7 +3195,7 @@
             </a:lvl1pPr>
           </a:lstStyle>
           <a:p>
-            <a:fld id="{01263597-6936-4BB2-8D3D-31DB45F24DDB}" type="datetimeFigureOut">
+            <a:fld id="{D8827759-9E9D-4BCD-80EE-8117F6B69200}" type="datetimeFigureOut">
               <a:rPr kumimoji="1" lang="ja-JP" altLang="en-US" smtClean="0"/>
               <a:t>2026/7/30</a:t>
             </a:fld>
@@ -3208,7 +3208,7 @@
           <p:cNvPr id="5" name="フッター プレースホルダー 4">
             <a:extLst>
               <a:ext uri="{FF2B5EF4-FFF2-40B4-BE49-F238E27FC236}">
-                <a16:creationId xmlns:a16="http://schemas.microsoft.com/office/drawing/2014/main" id="{8812C315-FE7C-0E94-98B2-2F7007C9A0BB}"/>
+                <a16:creationId xmlns:a16="http://schemas.microsoft.com/office/drawing/2014/main" id="{E48D29AA-AA4A-996F-399C-DEE2B0D30796}"/>
               </a:ext>
             </a:extLst>
           </p:cNvPr>
@@ -3251,7 +3251,7 @@
           <p:cNvPr id="6" name="スライド番号プレースホルダー 5">
             <a:extLst>
               <a:ext uri="{FF2B5EF4-FFF2-40B4-BE49-F238E27FC236}">
-                <a16:creationId xmlns:a16="http://schemas.microsoft.com/office/drawing/2014/main" id="{10036DC1-E4D0-0D9B-21B8-177051C3D7C2}"/>
+                <a16:creationId xmlns:a16="http://schemas.microsoft.com/office/drawing/2014/main" id="{718E4383-F429-A0EE-8CA7-E4CA2A2CA7F0}"/>
               </a:ext>
             </a:extLst>
           </p:cNvPr>
@@ -3285,7 +3285,7 @@
             </a:lvl1pPr>
           </a:lstStyle>
           <a:p>
-            <a:fld id="{739C73A2-29A2-471A-8A20-A8F5413FB700}" type="slidenum">
+            <a:fld id="{01F50A0A-288D-47A2-A2D6-08734344160D}" type="slidenum">
               <a:rPr kumimoji="1" lang="ja-JP" altLang="en-US" smtClean="0"/>
               <a:t>‹#›</a:t>
             </a:fld>
@@ -3296,7 +3296,7 @@
     </p:spTree>
     <p:extLst>
       <p:ext uri="{BB962C8B-B14F-4D97-AF65-F5344CB8AC3E}">
-        <p14:creationId xmlns:p14="http://schemas.microsoft.com/office/powerpoint/2010/main" val="3772323462"/>
+        <p14:creationId xmlns:p14="http://schemas.microsoft.com/office/powerpoint/2010/main" val="3587773523"/>
       </p:ext>
     </p:extLst>
   </p:cSld>
@@ -3619,7 +3619,7 @@
           <p:cNvPr id="2" name="テキスト ボックス 1">
             <a:extLst>
               <a:ext uri="{FF2B5EF4-FFF2-40B4-BE49-F238E27FC236}">
-                <a16:creationId xmlns:a16="http://schemas.microsoft.com/office/drawing/2014/main" id="{C2AB6F8F-0296-4A00-52ED-FC4003C0020D}"/>
+                <a16:creationId xmlns:a16="http://schemas.microsoft.com/office/drawing/2014/main" id="{AE0BC2CB-3A3C-C9C3-4763-183D3D05A3D6}"/>
               </a:ext>
             </a:extLst>
           </p:cNvPr>
@@ -3665,7 +3665,7 @@
           <p:cNvPr id="3" name="テキスト ボックス 2">
             <a:extLst>
               <a:ext uri="{FF2B5EF4-FFF2-40B4-BE49-F238E27FC236}">
-                <a16:creationId xmlns:a16="http://schemas.microsoft.com/office/drawing/2014/main" id="{3186BFD9-2054-E2CD-77B9-D8DC2EBC50C4}"/>
+                <a16:creationId xmlns:a16="http://schemas.microsoft.com/office/drawing/2014/main" id="{D8FF5C9A-B0D0-EB0E-EAA8-B932413EA8F1}"/>
               </a:ext>
             </a:extLst>
           </p:cNvPr>
@@ -3714,7 +3714,7 @@
           <p:cNvPr id="4" name="テキスト ボックス 3">
             <a:extLst>
               <a:ext uri="{FF2B5EF4-FFF2-40B4-BE49-F238E27FC236}">
-                <a16:creationId xmlns:a16="http://schemas.microsoft.com/office/drawing/2014/main" id="{88628792-C179-9A3E-8501-03DF92E72982}"/>
+                <a16:creationId xmlns:a16="http://schemas.microsoft.com/office/drawing/2014/main" id="{51B69D79-08A3-D0D1-D633-CC96C3CC6999}"/>
               </a:ext>
             </a:extLst>
           </p:cNvPr>
@@ -3754,7 +3754,7 @@
           <p:cNvPr id="5" name="テキスト ボックス 4">
             <a:extLst>
               <a:ext uri="{FF2B5EF4-FFF2-40B4-BE49-F238E27FC236}">
-                <a16:creationId xmlns:a16="http://schemas.microsoft.com/office/drawing/2014/main" id="{81D87BC8-20CF-E73A-BDDF-7D3012A7E279}"/>
+                <a16:creationId xmlns:a16="http://schemas.microsoft.com/office/drawing/2014/main" id="{523858AC-261E-1816-E994-4A18C277A1BC}"/>
               </a:ext>
             </a:extLst>
           </p:cNvPr>
@@ -3801,7 +3801,7 @@
             <a:hlinkClick r:id="" action="ppaction://media"/>
             <a:extLst>
               <a:ext uri="{FF2B5EF4-FFF2-40B4-BE49-F238E27FC236}">
-                <a16:creationId xmlns:a16="http://schemas.microsoft.com/office/drawing/2014/main" id="{1E5AD696-CD77-B44B-04B3-679734D4A7CC}"/>
+                <a16:creationId xmlns:a16="http://schemas.microsoft.com/office/drawing/2014/main" id="{4CB111A4-4D78-FAAF-F10C-4B02D3973F5A}"/>
               </a:ext>
             </a:extLst>
           </p:cNvPr>
@@ -3836,7 +3836,7 @@
     </p:spTree>
     <p:extLst>
       <p:ext uri="{BB962C8B-B14F-4D97-AF65-F5344CB8AC3E}">
-        <p14:creationId xmlns:p14="http://schemas.microsoft.com/office/powerpoint/2010/main" val="949353373"/>
+        <p14:creationId xmlns:p14="http://schemas.microsoft.com/office/powerpoint/2010/main" val="3878634035"/>
       </p:ext>
     </p:extLst>
   </p:cSld>
@@ -3960,7 +3960,7 @@
           <p:cNvPr id="2" name="テキスト ボックス 1">
             <a:extLst>
               <a:ext uri="{FF2B5EF4-FFF2-40B4-BE49-F238E27FC236}">
-                <a16:creationId xmlns:a16="http://schemas.microsoft.com/office/drawing/2014/main" id="{22FD724A-D66B-C071-A0FB-BFB169642538}"/>
+                <a16:creationId xmlns:a16="http://schemas.microsoft.com/office/drawing/2014/main" id="{07406D4E-CB4F-8356-77CA-54E14721B994}"/>
               </a:ext>
             </a:extLst>
           </p:cNvPr>
@@ -4006,7 +4006,7 @@
           <p:cNvPr id="3" name="テキスト ボックス 2">
             <a:extLst>
               <a:ext uri="{FF2B5EF4-FFF2-40B4-BE49-F238E27FC236}">
-                <a16:creationId xmlns:a16="http://schemas.microsoft.com/office/drawing/2014/main" id="{BCCEC30C-EDD9-5E93-EE2A-6E298D989311}"/>
+                <a16:creationId xmlns:a16="http://schemas.microsoft.com/office/drawing/2014/main" id="{ADDCBB31-7889-ABC6-8C67-E88DC2BFAE57}"/>
               </a:ext>
             </a:extLst>
           </p:cNvPr>
@@ -4046,7 +4046,7 @@
           <p:cNvPr id="4" name="テキスト ボックス 3">
             <a:extLst>
               <a:ext uri="{FF2B5EF4-FFF2-40B4-BE49-F238E27FC236}">
-                <a16:creationId xmlns:a16="http://schemas.microsoft.com/office/drawing/2014/main" id="{530E0B73-213A-EC92-0885-57A679BDC617}"/>
+                <a16:creationId xmlns:a16="http://schemas.microsoft.com/office/drawing/2014/main" id="{2E5DEE0C-00AB-F9A0-2279-271667A783B6}"/>
               </a:ext>
             </a:extLst>
           </p:cNvPr>
@@ -4056,7 +4056,7 @@
         <p:spPr>
           <a:xfrm>
             <a:off x="533400" y="3429000"/>
-            <a:ext cx="10795000" cy="707886"/>
+            <a:ext cx="10795000" cy="400110"/>
           </a:xfrm>
           <a:prstGeom prst="rect">
             <a:avLst/>
@@ -4076,14 +4076,17 @@
                 </a:solidFill>
                 <a:latin typeface="Arial" panose="020B0604020202020204" pitchFamily="34" charset="0"/>
               </a:rPr>
-              <a:t>Price Review Compare Recommended repository: price review compare Confirmed domain: reviewhikaku</a:t>
-            </a:r>
-            <a:endParaRPr kumimoji="1" lang="ja-JP" altLang="en-US" sz="2000">
-              <a:solidFill>
-                <a:srgbClr val="333333"/>
-              </a:solidFill>
-              <a:latin typeface="Arial" panose="020B0604020202020204" pitchFamily="34" charset="0"/>
-            </a:endParaRPr>
+              <a:t>Price Review Compare</a:t>
+            </a:r>
+            <a:r>
+              <a:rPr kumimoji="1" lang="ja-JP" altLang="en-US" sz="2000">
+                <a:solidFill>
+                  <a:srgbClr val="333333"/>
+                </a:solidFill>
+                <a:latin typeface="Arial" panose="020B0604020202020204" pitchFamily="34" charset="0"/>
+              </a:rPr>
+              <a:t>の目的、構成、実装を公開コードから確認できるプロジェクトです。</a:t>
+            </a:r>
           </a:p>
         </p:txBody>
       </p:sp>
@@ -4092,7 +4095,7 @@
           <p:cNvPr id="5" name="テキスト ボックス 4">
             <a:extLst>
               <a:ext uri="{FF2B5EF4-FFF2-40B4-BE49-F238E27FC236}">
-                <a16:creationId xmlns:a16="http://schemas.microsoft.com/office/drawing/2014/main" id="{103C34C5-FAF6-93D0-C09A-A199C2745336}"/>
+                <a16:creationId xmlns:a16="http://schemas.microsoft.com/office/drawing/2014/main" id="{3CCCE2F2-768C-2731-755E-6CEF334FF246}"/>
               </a:ext>
             </a:extLst>
           </p:cNvPr>
@@ -4139,7 +4142,7 @@
             <a:hlinkClick r:id="" action="ppaction://media"/>
             <a:extLst>
               <a:ext uri="{FF2B5EF4-FFF2-40B4-BE49-F238E27FC236}">
-                <a16:creationId xmlns:a16="http://schemas.microsoft.com/office/drawing/2014/main" id="{B98DB29F-62D9-4C92-C497-9E478A57ADB9}"/>
+                <a16:creationId xmlns:a16="http://schemas.microsoft.com/office/drawing/2014/main" id="{21888391-C418-01E1-ABE6-4D4F96EEE227}"/>
               </a:ext>
             </a:extLst>
           </p:cNvPr>
@@ -4174,7 +4177,7 @@
     </p:spTree>
     <p:extLst>
       <p:ext uri="{BB962C8B-B14F-4D97-AF65-F5344CB8AC3E}">
-        <p14:creationId xmlns:p14="http://schemas.microsoft.com/office/powerpoint/2010/main" val="2976226019"/>
+        <p14:creationId xmlns:p14="http://schemas.microsoft.com/office/powerpoint/2010/main" val="3804748556"/>
       </p:ext>
     </p:extLst>
   </p:cSld>
@@ -4217,7 +4220,7 @@
                                   <p:childTnLst>
                                     <p:cmd type="call" cmd="playFrom(0.0)">
                                       <p:cBhvr>
-                                        <p:cTn id="6" dur="7476" fill="hold"/>
+                                        <p:cTn id="6" dur="7551" fill="hold"/>
                                         <p:tgtEl>
                                           <p:spTgt spid="6"/>
                                         </p:tgtEl>
@@ -4298,7 +4301,7 @@
           <p:cNvPr id="2" name="テキスト ボックス 1">
             <a:extLst>
               <a:ext uri="{FF2B5EF4-FFF2-40B4-BE49-F238E27FC236}">
-                <a16:creationId xmlns:a16="http://schemas.microsoft.com/office/drawing/2014/main" id="{5353FE72-39C1-2675-D2EC-5C51310CD643}"/>
+                <a16:creationId xmlns:a16="http://schemas.microsoft.com/office/drawing/2014/main" id="{EDD49739-FE01-2C83-4949-4C5B6CA0EC9B}"/>
               </a:ext>
             </a:extLst>
           </p:cNvPr>
@@ -4344,7 +4347,7 @@
           <p:cNvPr id="3" name="テキスト ボックス 2">
             <a:extLst>
               <a:ext uri="{FF2B5EF4-FFF2-40B4-BE49-F238E27FC236}">
-                <a16:creationId xmlns:a16="http://schemas.microsoft.com/office/drawing/2014/main" id="{2C7F6C82-FAB0-7802-45E8-BB035278FC50}"/>
+                <a16:creationId xmlns:a16="http://schemas.microsoft.com/office/drawing/2014/main" id="{C669532D-CC42-A8DC-667E-25431B432396}"/>
               </a:ext>
             </a:extLst>
           </p:cNvPr>
@@ -4384,7 +4387,7 @@
           <p:cNvPr id="4" name="テキスト ボックス 3">
             <a:extLst>
               <a:ext uri="{FF2B5EF4-FFF2-40B4-BE49-F238E27FC236}">
-                <a16:creationId xmlns:a16="http://schemas.microsoft.com/office/drawing/2014/main" id="{8A3BA3AC-CA75-CFC3-CDE0-B9E0B63EF55C}"/>
+                <a16:creationId xmlns:a16="http://schemas.microsoft.com/office/drawing/2014/main" id="{DF4C9DB6-E7F1-05C0-170B-C509D3D2752C}"/>
               </a:ext>
             </a:extLst>
           </p:cNvPr>
@@ -4479,7 +4482,7 @@
           <p:cNvPr id="5" name="テキスト ボックス 4">
             <a:extLst>
               <a:ext uri="{FF2B5EF4-FFF2-40B4-BE49-F238E27FC236}">
-                <a16:creationId xmlns:a16="http://schemas.microsoft.com/office/drawing/2014/main" id="{15E0C73F-B022-316F-5718-0C7ACB918B46}"/>
+                <a16:creationId xmlns:a16="http://schemas.microsoft.com/office/drawing/2014/main" id="{71D712D2-6CE1-E676-465D-9D32BABE3988}"/>
               </a:ext>
             </a:extLst>
           </p:cNvPr>
@@ -4526,7 +4529,7 @@
             <a:hlinkClick r:id="" action="ppaction://media"/>
             <a:extLst>
               <a:ext uri="{FF2B5EF4-FFF2-40B4-BE49-F238E27FC236}">
-                <a16:creationId xmlns:a16="http://schemas.microsoft.com/office/drawing/2014/main" id="{946833B1-6D4D-8D05-904E-70BEC451C29B}"/>
+                <a16:creationId xmlns:a16="http://schemas.microsoft.com/office/drawing/2014/main" id="{953AAD4B-FEEC-8F53-E6DA-33EFAED9CEDB}"/>
               </a:ext>
             </a:extLst>
           </p:cNvPr>
@@ -4561,7 +4564,7 @@
     </p:spTree>
     <p:extLst>
       <p:ext uri="{BB962C8B-B14F-4D97-AF65-F5344CB8AC3E}">
-        <p14:creationId xmlns:p14="http://schemas.microsoft.com/office/powerpoint/2010/main" val="2074132903"/>
+        <p14:creationId xmlns:p14="http://schemas.microsoft.com/office/powerpoint/2010/main" val="3989900047"/>
       </p:ext>
     </p:extLst>
   </p:cSld>
@@ -4685,7 +4688,7 @@
           <p:cNvPr id="2" name="テキスト ボックス 1">
             <a:extLst>
               <a:ext uri="{FF2B5EF4-FFF2-40B4-BE49-F238E27FC236}">
-                <a16:creationId xmlns:a16="http://schemas.microsoft.com/office/drawing/2014/main" id="{AE0198D8-42BA-397B-2BA0-747A7DC3C48A}"/>
+                <a16:creationId xmlns:a16="http://schemas.microsoft.com/office/drawing/2014/main" id="{E373B903-2830-7970-D51B-DB3E72EA8920}"/>
               </a:ext>
             </a:extLst>
           </p:cNvPr>
@@ -4731,7 +4734,7 @@
           <p:cNvPr id="3" name="テキスト ボックス 2">
             <a:extLst>
               <a:ext uri="{FF2B5EF4-FFF2-40B4-BE49-F238E27FC236}">
-                <a16:creationId xmlns:a16="http://schemas.microsoft.com/office/drawing/2014/main" id="{17CFBB7F-1169-F910-DEC2-4ECFE98AC421}"/>
+                <a16:creationId xmlns:a16="http://schemas.microsoft.com/office/drawing/2014/main" id="{D76BE550-4A6A-3D73-A11C-F99659615FF7}"/>
               </a:ext>
             </a:extLst>
           </p:cNvPr>
@@ -4771,7 +4774,7 @@
           <p:cNvPr id="4" name="テキスト ボックス 3">
             <a:extLst>
               <a:ext uri="{FF2B5EF4-FFF2-40B4-BE49-F238E27FC236}">
-                <a16:creationId xmlns:a16="http://schemas.microsoft.com/office/drawing/2014/main" id="{D51F2897-EBEB-EAE8-898A-7CC2E5E4059F}"/>
+                <a16:creationId xmlns:a16="http://schemas.microsoft.com/office/drawing/2014/main" id="{AC10627D-2DC3-58EE-6CE4-2EE81D6C76B0}"/>
               </a:ext>
             </a:extLst>
           </p:cNvPr>
@@ -4881,7 +4884,7 @@
           <p:cNvPr id="5" name="テキスト ボックス 4">
             <a:extLst>
               <a:ext uri="{FF2B5EF4-FFF2-40B4-BE49-F238E27FC236}">
-                <a16:creationId xmlns:a16="http://schemas.microsoft.com/office/drawing/2014/main" id="{2CA73573-70F4-2702-E877-EA93353D1345}"/>
+                <a16:creationId xmlns:a16="http://schemas.microsoft.com/office/drawing/2014/main" id="{373CE99E-48F5-D602-BA04-12819844247C}"/>
               </a:ext>
             </a:extLst>
           </p:cNvPr>
@@ -4928,7 +4931,7 @@
             <a:hlinkClick r:id="" action="ppaction://media"/>
             <a:extLst>
               <a:ext uri="{FF2B5EF4-FFF2-40B4-BE49-F238E27FC236}">
-                <a16:creationId xmlns:a16="http://schemas.microsoft.com/office/drawing/2014/main" id="{017E2479-43F7-6181-C59A-F1668A5E7829}"/>
+                <a16:creationId xmlns:a16="http://schemas.microsoft.com/office/drawing/2014/main" id="{CD72BC26-AA11-92F5-9CC3-047EECD5FF74}"/>
               </a:ext>
             </a:extLst>
           </p:cNvPr>
@@ -4963,7 +4966,7 @@
     </p:spTree>
     <p:extLst>
       <p:ext uri="{BB962C8B-B14F-4D97-AF65-F5344CB8AC3E}">
-        <p14:creationId xmlns:p14="http://schemas.microsoft.com/office/powerpoint/2010/main" val="2611663206"/>
+        <p14:creationId xmlns:p14="http://schemas.microsoft.com/office/powerpoint/2010/main" val="2181381140"/>
       </p:ext>
     </p:extLst>
   </p:cSld>
@@ -5087,7 +5090,7 @@
           <p:cNvPr id="2" name="テキスト ボックス 1">
             <a:extLst>
               <a:ext uri="{FF2B5EF4-FFF2-40B4-BE49-F238E27FC236}">
-                <a16:creationId xmlns:a16="http://schemas.microsoft.com/office/drawing/2014/main" id="{C341A738-EACA-A074-6502-1D47C53EB50F}"/>
+                <a16:creationId xmlns:a16="http://schemas.microsoft.com/office/drawing/2014/main" id="{7F0A399B-2820-D2BE-5228-83DF23DFA28E}"/>
               </a:ext>
             </a:extLst>
           </p:cNvPr>
@@ -5133,7 +5136,7 @@
           <p:cNvPr id="3" name="テキスト ボックス 2">
             <a:extLst>
               <a:ext uri="{FF2B5EF4-FFF2-40B4-BE49-F238E27FC236}">
-                <a16:creationId xmlns:a16="http://schemas.microsoft.com/office/drawing/2014/main" id="{4BC67528-3DAE-D34C-3925-BD861A4CBBEF}"/>
+                <a16:creationId xmlns:a16="http://schemas.microsoft.com/office/drawing/2014/main" id="{E206AEC6-84A6-62FB-0E6A-610265BEE039}"/>
               </a:ext>
             </a:extLst>
           </p:cNvPr>
@@ -5173,7 +5176,7 @@
           <p:cNvPr id="4" name="テキスト ボックス 3">
             <a:extLst>
               <a:ext uri="{FF2B5EF4-FFF2-40B4-BE49-F238E27FC236}">
-                <a16:creationId xmlns:a16="http://schemas.microsoft.com/office/drawing/2014/main" id="{76278898-0E5F-DCD3-94DE-5F227602F521}"/>
+                <a16:creationId xmlns:a16="http://schemas.microsoft.com/office/drawing/2014/main" id="{30A879D0-FA79-C635-9549-26F6A2375BBF}"/>
               </a:ext>
             </a:extLst>
           </p:cNvPr>
@@ -5197,20 +5200,14 @@
           <a:lstStyle/>
           <a:p>
             <a:r>
-              <a:rPr kumimoji="1" lang="en-US" altLang="ja-JP" sz="2000">
+              <a:rPr kumimoji="1" lang="ja-JP" altLang="en-US" sz="2000">
                 <a:solidFill>
                   <a:srgbClr val="333333"/>
                 </a:solidFill>
                 <a:latin typeface="Arial" panose="020B0604020202020204" pitchFamily="34" charset="0"/>
               </a:rPr>
-              <a:t>Set confirmed custom domain</a:t>
-            </a:r>
-            <a:endParaRPr kumimoji="1" lang="ja-JP" altLang="en-US" sz="2000">
-              <a:solidFill>
-                <a:srgbClr val="333333"/>
-              </a:solidFill>
-              <a:latin typeface="Arial" panose="020B0604020202020204" pitchFamily="34" charset="0"/>
-            </a:endParaRPr>
+              <a:t>直近のコミットでは、実装の見直しと継続的な改善が行われました。</a:t>
+            </a:r>
           </a:p>
         </p:txBody>
       </p:sp>
@@ -5219,7 +5216,7 @@
           <p:cNvPr id="5" name="テキスト ボックス 4">
             <a:extLst>
               <a:ext uri="{FF2B5EF4-FFF2-40B4-BE49-F238E27FC236}">
-                <a16:creationId xmlns:a16="http://schemas.microsoft.com/office/drawing/2014/main" id="{1AF1DE36-E473-AEF3-3511-9FE53770436A}"/>
+                <a16:creationId xmlns:a16="http://schemas.microsoft.com/office/drawing/2014/main" id="{CD3C97CC-AAFB-0833-2D79-37CE7AD92CD1}"/>
               </a:ext>
             </a:extLst>
           </p:cNvPr>
@@ -5266,7 +5263,7 @@
             <a:hlinkClick r:id="" action="ppaction://media"/>
             <a:extLst>
               <a:ext uri="{FF2B5EF4-FFF2-40B4-BE49-F238E27FC236}">
-                <a16:creationId xmlns:a16="http://schemas.microsoft.com/office/drawing/2014/main" id="{7D8A6DD1-D5E0-B11F-26EF-56B71384FF21}"/>
+                <a16:creationId xmlns:a16="http://schemas.microsoft.com/office/drawing/2014/main" id="{AA3B0055-AD06-E16B-A3C8-C300A211BECE}"/>
               </a:ext>
             </a:extLst>
           </p:cNvPr>
@@ -5301,7 +5298,7 @@
     </p:spTree>
     <p:extLst>
       <p:ext uri="{BB962C8B-B14F-4D97-AF65-F5344CB8AC3E}">
-        <p14:creationId xmlns:p14="http://schemas.microsoft.com/office/powerpoint/2010/main" val="1907895919"/>
+        <p14:creationId xmlns:p14="http://schemas.microsoft.com/office/powerpoint/2010/main" val="2602656498"/>
       </p:ext>
     </p:extLst>
   </p:cSld>
@@ -5344,7 +5341,7 @@
                                   <p:childTnLst>
                                     <p:cmd type="call" cmd="playFrom(0.0)">
                                       <p:cBhvr>
-                                        <p:cTn id="6" dur="6451" fill="hold"/>
+                                        <p:cTn id="6" dur="6076" fill="hold"/>
                                         <p:tgtEl>
                                           <p:spTgt spid="6"/>
                                         </p:tgtEl>
@@ -5425,7 +5422,7 @@
           <p:cNvPr id="2" name="テキスト ボックス 1">
             <a:extLst>
               <a:ext uri="{FF2B5EF4-FFF2-40B4-BE49-F238E27FC236}">
-                <a16:creationId xmlns:a16="http://schemas.microsoft.com/office/drawing/2014/main" id="{53D2C012-CA60-850D-656D-BF64CE5BC253}"/>
+                <a16:creationId xmlns:a16="http://schemas.microsoft.com/office/drawing/2014/main" id="{4EFC81B1-5467-592D-2EFD-7DD13D00DC90}"/>
               </a:ext>
             </a:extLst>
           </p:cNvPr>
@@ -5471,7 +5468,7 @@
           <p:cNvPr id="3" name="テキスト ボックス 2">
             <a:extLst>
               <a:ext uri="{FF2B5EF4-FFF2-40B4-BE49-F238E27FC236}">
-                <a16:creationId xmlns:a16="http://schemas.microsoft.com/office/drawing/2014/main" id="{7845B67E-F86B-C0CD-29AE-B9BD0B867C53}"/>
+                <a16:creationId xmlns:a16="http://schemas.microsoft.com/office/drawing/2014/main" id="{B31C1B65-F0D3-FF67-BD7E-595FA34389A4}"/>
               </a:ext>
             </a:extLst>
           </p:cNvPr>
@@ -5511,7 +5508,7 @@
           <p:cNvPr id="4" name="テキスト ボックス 3">
             <a:extLst>
               <a:ext uri="{FF2B5EF4-FFF2-40B4-BE49-F238E27FC236}">
-                <a16:creationId xmlns:a16="http://schemas.microsoft.com/office/drawing/2014/main" id="{1EBECF6C-9A6E-377C-7591-D32A44D40563}"/>
+                <a16:creationId xmlns:a16="http://schemas.microsoft.com/office/drawing/2014/main" id="{46A309F2-6F5B-FEF4-42DB-E1AEC43BFCA2}"/>
               </a:ext>
             </a:extLst>
           </p:cNvPr>
@@ -5576,7 +5573,7 @@
           <p:cNvPr id="5" name="テキスト ボックス 4">
             <a:extLst>
               <a:ext uri="{FF2B5EF4-FFF2-40B4-BE49-F238E27FC236}">
-                <a16:creationId xmlns:a16="http://schemas.microsoft.com/office/drawing/2014/main" id="{6810AC3A-C1F8-0308-4D5B-24C4BD262A5C}"/>
+                <a16:creationId xmlns:a16="http://schemas.microsoft.com/office/drawing/2014/main" id="{05BB0FF8-E551-C2D8-7269-2E7EE4B0960F}"/>
               </a:ext>
             </a:extLst>
           </p:cNvPr>
@@ -5623,7 +5620,7 @@
             <a:hlinkClick r:id="" action="ppaction://media"/>
             <a:extLst>
               <a:ext uri="{FF2B5EF4-FFF2-40B4-BE49-F238E27FC236}">
-                <a16:creationId xmlns:a16="http://schemas.microsoft.com/office/drawing/2014/main" id="{CBA05397-85A7-6962-91A7-2B356482D67A}"/>
+                <a16:creationId xmlns:a16="http://schemas.microsoft.com/office/drawing/2014/main" id="{5C26041F-49F0-585F-1818-A45C2C05D0F2}"/>
               </a:ext>
             </a:extLst>
           </p:cNvPr>
@@ -5658,7 +5655,7 @@
     </p:spTree>
     <p:extLst>
       <p:ext uri="{BB962C8B-B14F-4D97-AF65-F5344CB8AC3E}">
-        <p14:creationId xmlns:p14="http://schemas.microsoft.com/office/powerpoint/2010/main" val="509442351"/>
+        <p14:creationId xmlns:p14="http://schemas.microsoft.com/office/powerpoint/2010/main" val="3745706849"/>
       </p:ext>
     </p:extLst>
   </p:cSld>
